--- a/assets/figures-editable/c1-c2/c1-e09.pptx
+++ b/assets/figures-editable/c1-c2/c1-e09.pptx
@@ -7,7 +7,7 @@
   <p:sldIdLst>
     <p:sldId id="256" r:id="rId7"/>
   </p:sldIdLst>
-  <p:sldSz cx="11948160" cy="7924799" type="screen4x3"/>
+  <p:sldSz cx="12191695" cy="6858000" type="screen4x3"/>
   <p:notesSz cx="6858000" cy="9144000"/>
   <p:defaultTextStyle>
     <a:defPPr>
@@ -3098,14 +3098,14 @@
       <p:grpSpPr/>
       <p:sp>
         <p:nvSpPr>
-          <p:cNvPr id="2" name="text1" descr="sci-ppt:C1-E09-001"/>
+          <p:cNvPr id="2" name="C1-E09 text 0" descr="sci-ppt:o000"/>
           <p:cNvSpPr txBox="1"/>
           <p:nvPr/>
         </p:nvSpPr>
         <p:spPr>
           <a:xfrm>
-            <a:off x="316992" y="268224"/>
-            <a:ext cx="11277600" cy="359054"/>
+            <a:off x="274320" y="118872"/>
+            <a:ext cx="11612880" cy="340105"/>
           </a:xfrm>
           <a:prstGeom prst="rect">
             <a:avLst/>
@@ -3114,7 +3114,7 @@
           <a:effectLst/>
         </p:spPr>
         <p:txBody>
-          <a:bodyPr wrap="none" lIns="27432" rIns="27432" tIns="18288" bIns="18288" anchor="ctr">
+          <a:bodyPr wrap="none" lIns="18288" rIns="18288" tIns="18288" bIns="18288" anchor="t">
             <a:spAutoFit/>
           </a:bodyPr>
           <a:lstStyle/>
@@ -3125,119 +3125,115 @@
               </a:spcAft>
             </a:pPr>
             <a:r>
-              <a:rPr sz="1823" b="0" i="0">
+              <a:rPr sz="1900" b="1" i="0">
                 <a:solidFill>
                   <a:srgbClr val="8EDBD4"/>
                 </a:solidFill>
                 <a:latin typeface="Arial"/>
               </a:rPr>
-              <a:t>C1-E09 | Physical-variable diagram</a:t>
-            </a:r>
-          </a:p>
-        </p:txBody>
-      </p:sp>
-      <p:sp>
-        <p:nvSpPr>
-          <p:cNvPr id="3" name="ellipse2" descr="sci-ppt:C1-E09-002"/>
-          <p:cNvSpPr/>
+              <a:t>C1-E09 · Exact kinetic-energy integral in the spherical model</a:t>
+            </a:r>
+          </a:p>
+        </p:txBody>
+      </p:sp>
+      <p:cxnSp>
+        <p:nvCxnSpPr>
+          <p:cNvPr id="3" name="C1-E09 line 1" descr="sci-ppt:o001"/>
+          <p:cNvCxnSpPr/>
           <p:nvPr/>
-        </p:nvSpPr>
-        <p:spPr>
-          <a:xfrm>
-            <a:off x="2438400" y="1645920"/>
-            <a:ext cx="1950720" cy="1950720"/>
-          </a:xfrm>
-          <a:prstGeom prst="ellipse">
-            <a:avLst/>
-          </a:prstGeom>
-          <a:solidFill>
-            <a:srgbClr val="213E4B"/>
-          </a:solidFill>
-          <a:ln w="21590">
+        </p:nvCxnSpPr>
+        <p:spPr>
+          <a:xfrm>
+            <a:off x="868680" y="5029200"/>
+            <a:ext cx="5486400" cy="0"/>
+          </a:xfrm>
+          <a:prstGeom prst="line">
+            <a:avLst/>
+          </a:prstGeom>
+          <a:ln w="19050">
             <a:solidFill>
               <a:srgbClr val="B4C7D2"/>
             </a:solidFill>
           </a:ln>
           <a:effectLst/>
         </p:spPr>
-        <p:txBody>
-          <a:bodyPr rtlCol="0" anchor="ctr"/>
-          <a:lstStyle/>
-          <a:p>
-            <a:pPr algn="ctr"/>
-          </a:p>
-        </p:txBody>
-      </p:sp>
-      <p:sp>
-        <p:nvSpPr>
-          <p:cNvPr id="4" name="ellipse3" descr="sci-ppt:C1-E09-003"/>
-          <p:cNvSpPr/>
+      </p:cxnSp>
+      <p:cxnSp>
+        <p:nvCxnSpPr>
+          <p:cNvPr id="4" name="C1-E09 line 2" descr="sci-ppt:o002"/>
+          <p:cNvCxnSpPr/>
           <p:nvPr/>
-        </p:nvSpPr>
-        <p:spPr>
-          <a:xfrm>
-            <a:off x="1706880" y="914400"/>
-            <a:ext cx="3413760" cy="3413760"/>
-          </a:xfrm>
-          <a:prstGeom prst="ellipse">
-            <a:avLst/>
-          </a:prstGeom>
-          <a:noFill/>
-          <a:ln w="21590">
+        </p:nvCxnSpPr>
+        <p:spPr>
+          <a:xfrm>
+            <a:off x="868680" y="1371600"/>
+            <a:ext cx="0" cy="3657600"/>
+          </a:xfrm>
+          <a:prstGeom prst="line">
+            <a:avLst/>
+          </a:prstGeom>
+          <a:ln w="19050">
             <a:solidFill>
               <a:srgbClr val="B4C7D2"/>
             </a:solidFill>
           </a:ln>
           <a:effectLst/>
         </p:spPr>
-        <p:txBody>
-          <a:bodyPr rtlCol="0" anchor="ctr"/>
-          <a:lstStyle/>
-          <a:p>
-            <a:pPr algn="ctr"/>
-          </a:p>
-        </p:txBody>
-      </p:sp>
-      <p:sp>
-        <p:nvSpPr>
-          <p:cNvPr id="5" name="ellipse4" descr="sci-ppt:C1-E09-004"/>
-          <p:cNvSpPr/>
+      </p:cxnSp>
+      <p:cxnSp>
+        <p:nvCxnSpPr>
+          <p:cNvPr id="5" name="C1-E09 line 3" descr="sci-ppt:o003"/>
+          <p:cNvCxnSpPr/>
           <p:nvPr/>
-        </p:nvSpPr>
-        <p:spPr>
-          <a:xfrm>
-            <a:off x="1524000" y="731520"/>
-            <a:ext cx="3779520" cy="3779520"/>
-          </a:xfrm>
-          <a:prstGeom prst="ellipse">
-            <a:avLst/>
-          </a:prstGeom>
-          <a:noFill/>
-          <a:ln w="21590">
+        </p:nvCxnSpPr>
+        <p:spPr>
+          <a:xfrm>
+            <a:off x="868680" y="5029200"/>
+            <a:ext cx="0" cy="64008"/>
+          </a:xfrm>
+          <a:prstGeom prst="line">
+            <a:avLst/>
+          </a:prstGeom>
+          <a:ln w="12700">
             <a:solidFill>
               <a:srgbClr val="B4C7D2"/>
             </a:solidFill>
           </a:ln>
           <a:effectLst/>
         </p:spPr>
-        <p:txBody>
-          <a:bodyPr rtlCol="0" anchor="ctr"/>
-          <a:lstStyle/>
-          <a:p>
-            <a:pPr algn="ctr"/>
-          </a:p>
-        </p:txBody>
-      </p:sp>
-      <p:sp>
-        <p:nvSpPr>
-          <p:cNvPr id="6" name="text5" descr="sci-ppt:C1-E09-005"/>
+      </p:cxnSp>
+      <p:cxnSp>
+        <p:nvCxnSpPr>
+          <p:cNvPr id="6" name="C1-E09 line 4" descr="sci-ppt:o004"/>
+          <p:cNvCxnSpPr/>
+          <p:nvPr/>
+        </p:nvCxnSpPr>
+        <p:spPr>
+          <a:xfrm>
+            <a:off x="868680" y="1371600"/>
+            <a:ext cx="0" cy="3657600"/>
+          </a:xfrm>
+          <a:prstGeom prst="line">
+            <a:avLst/>
+          </a:prstGeom>
+          <a:ln w="7620">
+            <a:solidFill>
+              <a:srgbClr val="2E4756"/>
+            </a:solidFill>
+          </a:ln>
+          <a:effectLst/>
+        </p:spPr>
+      </p:cxnSp>
+      <p:sp>
+        <p:nvSpPr>
+          <p:cNvPr id="7" name="C1-E09 text 5" descr="sci-ppt:o005"/>
           <p:cNvSpPr txBox="1"/>
           <p:nvPr/>
         </p:nvSpPr>
         <p:spPr>
           <a:xfrm>
-            <a:off x="2438400" y="2560320"/>
-            <a:ext cx="2438400" cy="415747"/>
+            <a:off x="411479" y="5111496"/>
+            <a:ext cx="914400" cy="208407"/>
           </a:xfrm>
           <a:prstGeom prst="rect">
             <a:avLst/>
@@ -3246,7 +3242,865 @@
           <a:effectLst/>
         </p:spPr>
         <p:txBody>
-          <a:bodyPr wrap="none" lIns="27432" rIns="27432" tIns="18288" bIns="18288" anchor="ctr">
+          <a:bodyPr wrap="none" lIns="18288" rIns="18288" tIns="18288" bIns="18288" anchor="t">
+            <a:spAutoFit/>
+          </a:bodyPr>
+          <a:lstStyle/>
+          <a:p>
+            <a:pPr algn="ctr">
+              <a:spcAft>
+                <a:spcPts val="0"/>
+              </a:spcAft>
+            </a:pPr>
+            <a:r>
+              <a:rPr sz="1050" b="0" i="0">
+                <a:solidFill>
+                  <a:srgbClr val="B4C7D2"/>
+                </a:solidFill>
+                <a:latin typeface="Arial"/>
+              </a:rPr>
+              <a:t>1</a:t>
+            </a:r>
+          </a:p>
+        </p:txBody>
+      </p:sp>
+      <p:cxnSp>
+        <p:nvCxnSpPr>
+          <p:cNvPr id="8" name="C1-E09 line 6" descr="sci-ppt:o006"/>
+          <p:cNvCxnSpPr/>
+          <p:nvPr/>
+        </p:nvCxnSpPr>
+        <p:spPr>
+          <a:xfrm>
+            <a:off x="1965960" y="5029200"/>
+            <a:ext cx="0" cy="64008"/>
+          </a:xfrm>
+          <a:prstGeom prst="line">
+            <a:avLst/>
+          </a:prstGeom>
+          <a:ln w="12700">
+            <a:solidFill>
+              <a:srgbClr val="B4C7D2"/>
+            </a:solidFill>
+          </a:ln>
+          <a:effectLst/>
+        </p:spPr>
+      </p:cxnSp>
+      <p:cxnSp>
+        <p:nvCxnSpPr>
+          <p:cNvPr id="9" name="C1-E09 line 7" descr="sci-ppt:o007"/>
+          <p:cNvCxnSpPr/>
+          <p:nvPr/>
+        </p:nvCxnSpPr>
+        <p:spPr>
+          <a:xfrm>
+            <a:off x="1965960" y="1371600"/>
+            <a:ext cx="0" cy="3657600"/>
+          </a:xfrm>
+          <a:prstGeom prst="line">
+            <a:avLst/>
+          </a:prstGeom>
+          <a:ln w="7620">
+            <a:solidFill>
+              <a:srgbClr val="2E4756"/>
+            </a:solidFill>
+          </a:ln>
+          <a:effectLst/>
+        </p:spPr>
+      </p:cxnSp>
+      <p:sp>
+        <p:nvSpPr>
+          <p:cNvPr id="10" name="C1-E09 text 8" descr="sci-ppt:o008"/>
+          <p:cNvSpPr txBox="1"/>
+          <p:nvPr/>
+        </p:nvSpPr>
+        <p:spPr>
+          <a:xfrm>
+            <a:off x="1508760" y="5111496"/>
+            <a:ext cx="914400" cy="208407"/>
+          </a:xfrm>
+          <a:prstGeom prst="rect">
+            <a:avLst/>
+          </a:prstGeom>
+          <a:noFill/>
+          <a:effectLst/>
+        </p:spPr>
+        <p:txBody>
+          <a:bodyPr wrap="none" lIns="18288" rIns="18288" tIns="18288" bIns="18288" anchor="t">
+            <a:spAutoFit/>
+          </a:bodyPr>
+          <a:lstStyle/>
+          <a:p>
+            <a:pPr algn="ctr">
+              <a:spcAft>
+                <a:spcPts val="0"/>
+              </a:spcAft>
+            </a:pPr>
+            <a:r>
+              <a:rPr sz="1050" b="0" i="0">
+                <a:solidFill>
+                  <a:srgbClr val="B4C7D2"/>
+                </a:solidFill>
+                <a:latin typeface="Arial"/>
+              </a:rPr>
+              <a:t>2</a:t>
+            </a:r>
+          </a:p>
+        </p:txBody>
+      </p:sp>
+      <p:cxnSp>
+        <p:nvCxnSpPr>
+          <p:cNvPr id="11" name="C1-E09 line 9" descr="sci-ppt:o009"/>
+          <p:cNvCxnSpPr/>
+          <p:nvPr/>
+        </p:nvCxnSpPr>
+        <p:spPr>
+          <a:xfrm>
+            <a:off x="3063240" y="5029200"/>
+            <a:ext cx="0" cy="64008"/>
+          </a:xfrm>
+          <a:prstGeom prst="line">
+            <a:avLst/>
+          </a:prstGeom>
+          <a:ln w="12700">
+            <a:solidFill>
+              <a:srgbClr val="B4C7D2"/>
+            </a:solidFill>
+          </a:ln>
+          <a:effectLst/>
+        </p:spPr>
+      </p:cxnSp>
+      <p:cxnSp>
+        <p:nvCxnSpPr>
+          <p:cNvPr id="12" name="C1-E09 line 10" descr="sci-ppt:o010"/>
+          <p:cNvCxnSpPr/>
+          <p:nvPr/>
+        </p:nvCxnSpPr>
+        <p:spPr>
+          <a:xfrm>
+            <a:off x="3063240" y="1371600"/>
+            <a:ext cx="0" cy="3657600"/>
+          </a:xfrm>
+          <a:prstGeom prst="line">
+            <a:avLst/>
+          </a:prstGeom>
+          <a:ln w="7620">
+            <a:solidFill>
+              <a:srgbClr val="2E4756"/>
+            </a:solidFill>
+          </a:ln>
+          <a:effectLst/>
+        </p:spPr>
+      </p:cxnSp>
+      <p:sp>
+        <p:nvSpPr>
+          <p:cNvPr id="13" name="C1-E09 text 11" descr="sci-ppt:o011"/>
+          <p:cNvSpPr txBox="1"/>
+          <p:nvPr/>
+        </p:nvSpPr>
+        <p:spPr>
+          <a:xfrm>
+            <a:off x="2606040" y="5111496"/>
+            <a:ext cx="914400" cy="208407"/>
+          </a:xfrm>
+          <a:prstGeom prst="rect">
+            <a:avLst/>
+          </a:prstGeom>
+          <a:noFill/>
+          <a:effectLst/>
+        </p:spPr>
+        <p:txBody>
+          <a:bodyPr wrap="none" lIns="18288" rIns="18288" tIns="18288" bIns="18288" anchor="t">
+            <a:spAutoFit/>
+          </a:bodyPr>
+          <a:lstStyle/>
+          <a:p>
+            <a:pPr algn="ctr">
+              <a:spcAft>
+                <a:spcPts val="0"/>
+              </a:spcAft>
+            </a:pPr>
+            <a:r>
+              <a:rPr sz="1050" b="0" i="0">
+                <a:solidFill>
+                  <a:srgbClr val="B4C7D2"/>
+                </a:solidFill>
+                <a:latin typeface="Arial"/>
+              </a:rPr>
+              <a:t>3</a:t>
+            </a:r>
+          </a:p>
+        </p:txBody>
+      </p:sp>
+      <p:cxnSp>
+        <p:nvCxnSpPr>
+          <p:cNvPr id="14" name="C1-E09 line 12" descr="sci-ppt:o012"/>
+          <p:cNvCxnSpPr/>
+          <p:nvPr/>
+        </p:nvCxnSpPr>
+        <p:spPr>
+          <a:xfrm>
+            <a:off x="4160520" y="5029200"/>
+            <a:ext cx="0" cy="64008"/>
+          </a:xfrm>
+          <a:prstGeom prst="line">
+            <a:avLst/>
+          </a:prstGeom>
+          <a:ln w="12700">
+            <a:solidFill>
+              <a:srgbClr val="B4C7D2"/>
+            </a:solidFill>
+          </a:ln>
+          <a:effectLst/>
+        </p:spPr>
+      </p:cxnSp>
+      <p:cxnSp>
+        <p:nvCxnSpPr>
+          <p:cNvPr id="15" name="C1-E09 line 13" descr="sci-ppt:o013"/>
+          <p:cNvCxnSpPr/>
+          <p:nvPr/>
+        </p:nvCxnSpPr>
+        <p:spPr>
+          <a:xfrm>
+            <a:off x="4160520" y="1371600"/>
+            <a:ext cx="0" cy="3657600"/>
+          </a:xfrm>
+          <a:prstGeom prst="line">
+            <a:avLst/>
+          </a:prstGeom>
+          <a:ln w="7620">
+            <a:solidFill>
+              <a:srgbClr val="2E4756"/>
+            </a:solidFill>
+          </a:ln>
+          <a:effectLst/>
+        </p:spPr>
+      </p:cxnSp>
+      <p:sp>
+        <p:nvSpPr>
+          <p:cNvPr id="16" name="C1-E09 text 14" descr="sci-ppt:o014"/>
+          <p:cNvSpPr txBox="1"/>
+          <p:nvPr/>
+        </p:nvSpPr>
+        <p:spPr>
+          <a:xfrm>
+            <a:off x="3703320" y="5111496"/>
+            <a:ext cx="914400" cy="208407"/>
+          </a:xfrm>
+          <a:prstGeom prst="rect">
+            <a:avLst/>
+          </a:prstGeom>
+          <a:noFill/>
+          <a:effectLst/>
+        </p:spPr>
+        <p:txBody>
+          <a:bodyPr wrap="none" lIns="18288" rIns="18288" tIns="18288" bIns="18288" anchor="t">
+            <a:spAutoFit/>
+          </a:bodyPr>
+          <a:lstStyle/>
+          <a:p>
+            <a:pPr algn="ctr">
+              <a:spcAft>
+                <a:spcPts val="0"/>
+              </a:spcAft>
+            </a:pPr>
+            <a:r>
+              <a:rPr sz="1050" b="0" i="0">
+                <a:solidFill>
+                  <a:srgbClr val="B4C7D2"/>
+                </a:solidFill>
+                <a:latin typeface="Arial"/>
+              </a:rPr>
+              <a:t>4</a:t>
+            </a:r>
+          </a:p>
+        </p:txBody>
+      </p:sp>
+      <p:cxnSp>
+        <p:nvCxnSpPr>
+          <p:cNvPr id="17" name="C1-E09 line 15" descr="sci-ppt:o015"/>
+          <p:cNvCxnSpPr/>
+          <p:nvPr/>
+        </p:nvCxnSpPr>
+        <p:spPr>
+          <a:xfrm>
+            <a:off x="5257800" y="5029200"/>
+            <a:ext cx="0" cy="64008"/>
+          </a:xfrm>
+          <a:prstGeom prst="line">
+            <a:avLst/>
+          </a:prstGeom>
+          <a:ln w="12700">
+            <a:solidFill>
+              <a:srgbClr val="B4C7D2"/>
+            </a:solidFill>
+          </a:ln>
+          <a:effectLst/>
+        </p:spPr>
+      </p:cxnSp>
+      <p:cxnSp>
+        <p:nvCxnSpPr>
+          <p:cNvPr id="18" name="C1-E09 line 16" descr="sci-ppt:o016"/>
+          <p:cNvCxnSpPr/>
+          <p:nvPr/>
+        </p:nvCxnSpPr>
+        <p:spPr>
+          <a:xfrm>
+            <a:off x="5257800" y="1371600"/>
+            <a:ext cx="0" cy="3657600"/>
+          </a:xfrm>
+          <a:prstGeom prst="line">
+            <a:avLst/>
+          </a:prstGeom>
+          <a:ln w="7620">
+            <a:solidFill>
+              <a:srgbClr val="2E4756"/>
+            </a:solidFill>
+          </a:ln>
+          <a:effectLst/>
+        </p:spPr>
+      </p:cxnSp>
+      <p:sp>
+        <p:nvSpPr>
+          <p:cNvPr id="19" name="C1-E09 text 17" descr="sci-ppt:o017"/>
+          <p:cNvSpPr txBox="1"/>
+          <p:nvPr/>
+        </p:nvSpPr>
+        <p:spPr>
+          <a:xfrm>
+            <a:off x="4800600" y="5111496"/>
+            <a:ext cx="914400" cy="208407"/>
+          </a:xfrm>
+          <a:prstGeom prst="rect">
+            <a:avLst/>
+          </a:prstGeom>
+          <a:noFill/>
+          <a:effectLst/>
+        </p:spPr>
+        <p:txBody>
+          <a:bodyPr wrap="none" lIns="18288" rIns="18288" tIns="18288" bIns="18288" anchor="t">
+            <a:spAutoFit/>
+          </a:bodyPr>
+          <a:lstStyle/>
+          <a:p>
+            <a:pPr algn="ctr">
+              <a:spcAft>
+                <a:spcPts val="0"/>
+              </a:spcAft>
+            </a:pPr>
+            <a:r>
+              <a:rPr sz="1050" b="0" i="0">
+                <a:solidFill>
+                  <a:srgbClr val="B4C7D2"/>
+                </a:solidFill>
+                <a:latin typeface="Arial"/>
+              </a:rPr>
+              <a:t>5</a:t>
+            </a:r>
+          </a:p>
+        </p:txBody>
+      </p:sp>
+      <p:cxnSp>
+        <p:nvCxnSpPr>
+          <p:cNvPr id="20" name="C1-E09 line 18" descr="sci-ppt:o018"/>
+          <p:cNvCxnSpPr/>
+          <p:nvPr/>
+        </p:nvCxnSpPr>
+        <p:spPr>
+          <a:xfrm>
+            <a:off x="6355080" y="5029200"/>
+            <a:ext cx="0" cy="64008"/>
+          </a:xfrm>
+          <a:prstGeom prst="line">
+            <a:avLst/>
+          </a:prstGeom>
+          <a:ln w="12700">
+            <a:solidFill>
+              <a:srgbClr val="B4C7D2"/>
+            </a:solidFill>
+          </a:ln>
+          <a:effectLst/>
+        </p:spPr>
+      </p:cxnSp>
+      <p:cxnSp>
+        <p:nvCxnSpPr>
+          <p:cNvPr id="21" name="C1-E09 line 19" descr="sci-ppt:o019"/>
+          <p:cNvCxnSpPr/>
+          <p:nvPr/>
+        </p:nvCxnSpPr>
+        <p:spPr>
+          <a:xfrm>
+            <a:off x="6355080" y="1371600"/>
+            <a:ext cx="0" cy="3657600"/>
+          </a:xfrm>
+          <a:prstGeom prst="line">
+            <a:avLst/>
+          </a:prstGeom>
+          <a:ln w="7620">
+            <a:solidFill>
+              <a:srgbClr val="2E4756"/>
+            </a:solidFill>
+          </a:ln>
+          <a:effectLst/>
+        </p:spPr>
+      </p:cxnSp>
+      <p:sp>
+        <p:nvSpPr>
+          <p:cNvPr id="22" name="C1-E09 text 20" descr="sci-ppt:o020"/>
+          <p:cNvSpPr txBox="1"/>
+          <p:nvPr/>
+        </p:nvSpPr>
+        <p:spPr>
+          <a:xfrm>
+            <a:off x="5897880" y="5111496"/>
+            <a:ext cx="914400" cy="208407"/>
+          </a:xfrm>
+          <a:prstGeom prst="rect">
+            <a:avLst/>
+          </a:prstGeom>
+          <a:noFill/>
+          <a:effectLst/>
+        </p:spPr>
+        <p:txBody>
+          <a:bodyPr wrap="none" lIns="18288" rIns="18288" tIns="18288" bIns="18288" anchor="t">
+            <a:spAutoFit/>
+          </a:bodyPr>
+          <a:lstStyle/>
+          <a:p>
+            <a:pPr algn="ctr">
+              <a:spcAft>
+                <a:spcPts val="0"/>
+              </a:spcAft>
+            </a:pPr>
+            <a:r>
+              <a:rPr sz="1050" b="0" i="0">
+                <a:solidFill>
+                  <a:srgbClr val="B4C7D2"/>
+                </a:solidFill>
+                <a:latin typeface="Arial"/>
+              </a:rPr>
+              <a:t>6</a:t>
+            </a:r>
+          </a:p>
+        </p:txBody>
+      </p:sp>
+      <p:cxnSp>
+        <p:nvCxnSpPr>
+          <p:cNvPr id="23" name="C1-E09 line 21" descr="sci-ppt:o021"/>
+          <p:cNvCxnSpPr/>
+          <p:nvPr/>
+        </p:nvCxnSpPr>
+        <p:spPr>
+          <a:xfrm>
+            <a:off x="804671" y="5029200"/>
+            <a:ext cx="64009" cy="0"/>
+          </a:xfrm>
+          <a:prstGeom prst="line">
+            <a:avLst/>
+          </a:prstGeom>
+          <a:ln w="12700">
+            <a:solidFill>
+              <a:srgbClr val="B4C7D2"/>
+            </a:solidFill>
+          </a:ln>
+          <a:effectLst/>
+        </p:spPr>
+      </p:cxnSp>
+      <p:cxnSp>
+        <p:nvCxnSpPr>
+          <p:cNvPr id="24" name="C1-E09 line 22" descr="sci-ppt:o022"/>
+          <p:cNvCxnSpPr/>
+          <p:nvPr/>
+        </p:nvCxnSpPr>
+        <p:spPr>
+          <a:xfrm>
+            <a:off x="804671" y="4158342"/>
+            <a:ext cx="64009" cy="0"/>
+          </a:xfrm>
+          <a:prstGeom prst="line">
+            <a:avLst/>
+          </a:prstGeom>
+          <a:ln w="12700">
+            <a:solidFill>
+              <a:srgbClr val="B4C7D2"/>
+            </a:solidFill>
+          </a:ln>
+          <a:effectLst/>
+        </p:spPr>
+      </p:cxnSp>
+      <p:cxnSp>
+        <p:nvCxnSpPr>
+          <p:cNvPr id="25" name="C1-E09 line 23" descr="sci-ppt:o023"/>
+          <p:cNvCxnSpPr/>
+          <p:nvPr/>
+        </p:nvCxnSpPr>
+        <p:spPr>
+          <a:xfrm>
+            <a:off x="868680" y="4158342"/>
+            <a:ext cx="5486400" cy="0"/>
+          </a:xfrm>
+          <a:prstGeom prst="line">
+            <a:avLst/>
+          </a:prstGeom>
+          <a:ln w="7620">
+            <a:solidFill>
+              <a:srgbClr val="2E4756"/>
+            </a:solidFill>
+          </a:ln>
+          <a:effectLst/>
+        </p:spPr>
+      </p:cxnSp>
+      <p:sp>
+        <p:nvSpPr>
+          <p:cNvPr id="26" name="C1-E09 text 24" descr="sci-ppt:o024"/>
+          <p:cNvSpPr txBox="1"/>
+          <p:nvPr/>
+        </p:nvSpPr>
+        <p:spPr>
+          <a:xfrm>
+            <a:off x="0" y="4076046"/>
+            <a:ext cx="777240" cy="208407"/>
+          </a:xfrm>
+          <a:prstGeom prst="rect">
+            <a:avLst/>
+          </a:prstGeom>
+          <a:noFill/>
+          <a:effectLst/>
+        </p:spPr>
+        <p:txBody>
+          <a:bodyPr wrap="none" lIns="18288" rIns="18288" tIns="18288" bIns="18288" anchor="t">
+            <a:spAutoFit/>
+          </a:bodyPr>
+          <a:lstStyle/>
+          <a:p>
+            <a:pPr algn="r">
+              <a:spcAft>
+                <a:spcPts val="0"/>
+              </a:spcAft>
+            </a:pPr>
+            <a:r>
+              <a:rPr sz="1050" b="0" i="0">
+                <a:solidFill>
+                  <a:srgbClr val="B4C7D2"/>
+                </a:solidFill>
+                <a:latin typeface="Arial"/>
+              </a:rPr>
+              <a:t>0.25</a:t>
+            </a:r>
+          </a:p>
+        </p:txBody>
+      </p:sp>
+      <p:cxnSp>
+        <p:nvCxnSpPr>
+          <p:cNvPr id="27" name="C1-E09 line 25" descr="sci-ppt:o025"/>
+          <p:cNvCxnSpPr/>
+          <p:nvPr/>
+        </p:nvCxnSpPr>
+        <p:spPr>
+          <a:xfrm>
+            <a:off x="804671" y="3287485"/>
+            <a:ext cx="64009" cy="0"/>
+          </a:xfrm>
+          <a:prstGeom prst="line">
+            <a:avLst/>
+          </a:prstGeom>
+          <a:ln w="12700">
+            <a:solidFill>
+              <a:srgbClr val="B4C7D2"/>
+            </a:solidFill>
+          </a:ln>
+          <a:effectLst/>
+        </p:spPr>
+      </p:cxnSp>
+      <p:cxnSp>
+        <p:nvCxnSpPr>
+          <p:cNvPr id="28" name="C1-E09 line 26" descr="sci-ppt:o026"/>
+          <p:cNvCxnSpPr/>
+          <p:nvPr/>
+        </p:nvCxnSpPr>
+        <p:spPr>
+          <a:xfrm>
+            <a:off x="868680" y="3287485"/>
+            <a:ext cx="5486400" cy="0"/>
+          </a:xfrm>
+          <a:prstGeom prst="line">
+            <a:avLst/>
+          </a:prstGeom>
+          <a:ln w="7620">
+            <a:solidFill>
+              <a:srgbClr val="2E4756"/>
+            </a:solidFill>
+          </a:ln>
+          <a:effectLst/>
+        </p:spPr>
+      </p:cxnSp>
+      <p:sp>
+        <p:nvSpPr>
+          <p:cNvPr id="29" name="C1-E09 text 27" descr="sci-ppt:o027"/>
+          <p:cNvSpPr txBox="1"/>
+          <p:nvPr/>
+        </p:nvSpPr>
+        <p:spPr>
+          <a:xfrm>
+            <a:off x="0" y="3205189"/>
+            <a:ext cx="777240" cy="208407"/>
+          </a:xfrm>
+          <a:prstGeom prst="rect">
+            <a:avLst/>
+          </a:prstGeom>
+          <a:noFill/>
+          <a:effectLst/>
+        </p:spPr>
+        <p:txBody>
+          <a:bodyPr wrap="none" lIns="18288" rIns="18288" tIns="18288" bIns="18288" anchor="t">
+            <a:spAutoFit/>
+          </a:bodyPr>
+          <a:lstStyle/>
+          <a:p>
+            <a:pPr algn="r">
+              <a:spcAft>
+                <a:spcPts val="0"/>
+              </a:spcAft>
+            </a:pPr>
+            <a:r>
+              <a:rPr sz="1050" b="0" i="0">
+                <a:solidFill>
+                  <a:srgbClr val="B4C7D2"/>
+                </a:solidFill>
+                <a:latin typeface="Arial"/>
+              </a:rPr>
+              <a:t>0.50</a:t>
+            </a:r>
+          </a:p>
+        </p:txBody>
+      </p:sp>
+      <p:cxnSp>
+        <p:nvCxnSpPr>
+          <p:cNvPr id="30" name="C1-E09 line 28" descr="sci-ppt:o028"/>
+          <p:cNvCxnSpPr/>
+          <p:nvPr/>
+        </p:nvCxnSpPr>
+        <p:spPr>
+          <a:xfrm>
+            <a:off x="804671" y="2416628"/>
+            <a:ext cx="64009" cy="0"/>
+          </a:xfrm>
+          <a:prstGeom prst="line">
+            <a:avLst/>
+          </a:prstGeom>
+          <a:ln w="12700">
+            <a:solidFill>
+              <a:srgbClr val="B4C7D2"/>
+            </a:solidFill>
+          </a:ln>
+          <a:effectLst/>
+        </p:spPr>
+      </p:cxnSp>
+      <p:cxnSp>
+        <p:nvCxnSpPr>
+          <p:cNvPr id="31" name="C1-E09 line 29" descr="sci-ppt:o029"/>
+          <p:cNvCxnSpPr/>
+          <p:nvPr/>
+        </p:nvCxnSpPr>
+        <p:spPr>
+          <a:xfrm>
+            <a:off x="868680" y="2416628"/>
+            <a:ext cx="5486400" cy="0"/>
+          </a:xfrm>
+          <a:prstGeom prst="line">
+            <a:avLst/>
+          </a:prstGeom>
+          <a:ln w="7620">
+            <a:solidFill>
+              <a:srgbClr val="2E4756"/>
+            </a:solidFill>
+          </a:ln>
+          <a:effectLst/>
+        </p:spPr>
+      </p:cxnSp>
+      <p:sp>
+        <p:nvSpPr>
+          <p:cNvPr id="32" name="C1-E09 text 30" descr="sci-ppt:o030"/>
+          <p:cNvSpPr txBox="1"/>
+          <p:nvPr/>
+        </p:nvSpPr>
+        <p:spPr>
+          <a:xfrm>
+            <a:off x="0" y="2334332"/>
+            <a:ext cx="777240" cy="208407"/>
+          </a:xfrm>
+          <a:prstGeom prst="rect">
+            <a:avLst/>
+          </a:prstGeom>
+          <a:noFill/>
+          <a:effectLst/>
+        </p:spPr>
+        <p:txBody>
+          <a:bodyPr wrap="none" lIns="18288" rIns="18288" tIns="18288" bIns="18288" anchor="t">
+            <a:spAutoFit/>
+          </a:bodyPr>
+          <a:lstStyle/>
+          <a:p>
+            <a:pPr algn="r">
+              <a:spcAft>
+                <a:spcPts val="0"/>
+              </a:spcAft>
+            </a:pPr>
+            <a:r>
+              <a:rPr sz="1050" b="0" i="0">
+                <a:solidFill>
+                  <a:srgbClr val="B4C7D2"/>
+                </a:solidFill>
+                <a:latin typeface="Arial"/>
+              </a:rPr>
+              <a:t>0.75</a:t>
+            </a:r>
+          </a:p>
+        </p:txBody>
+      </p:sp>
+      <p:cxnSp>
+        <p:nvCxnSpPr>
+          <p:cNvPr id="33" name="C1-E09 line 31" descr="sci-ppt:o031"/>
+          <p:cNvCxnSpPr/>
+          <p:nvPr/>
+        </p:nvCxnSpPr>
+        <p:spPr>
+          <a:xfrm>
+            <a:off x="804671" y="1545771"/>
+            <a:ext cx="64009" cy="0"/>
+          </a:xfrm>
+          <a:prstGeom prst="line">
+            <a:avLst/>
+          </a:prstGeom>
+          <a:ln w="12700">
+            <a:solidFill>
+              <a:srgbClr val="B4C7D2"/>
+            </a:solidFill>
+          </a:ln>
+          <a:effectLst/>
+        </p:spPr>
+      </p:cxnSp>
+      <p:cxnSp>
+        <p:nvCxnSpPr>
+          <p:cNvPr id="34" name="C1-E09 line 32" descr="sci-ppt:o032"/>
+          <p:cNvCxnSpPr/>
+          <p:nvPr/>
+        </p:nvCxnSpPr>
+        <p:spPr>
+          <a:xfrm>
+            <a:off x="868680" y="1545771"/>
+            <a:ext cx="5486400" cy="0"/>
+          </a:xfrm>
+          <a:prstGeom prst="line">
+            <a:avLst/>
+          </a:prstGeom>
+          <a:ln w="7620">
+            <a:solidFill>
+              <a:srgbClr val="2E4756"/>
+            </a:solidFill>
+          </a:ln>
+          <a:effectLst/>
+        </p:spPr>
+      </p:cxnSp>
+      <p:sp>
+        <p:nvSpPr>
+          <p:cNvPr id="35" name="C1-E09 text 33" descr="sci-ppt:o033"/>
+          <p:cNvSpPr txBox="1"/>
+          <p:nvPr/>
+        </p:nvSpPr>
+        <p:spPr>
+          <a:xfrm>
+            <a:off x="0" y="1463475"/>
+            <a:ext cx="777240" cy="208407"/>
+          </a:xfrm>
+          <a:prstGeom prst="rect">
+            <a:avLst/>
+          </a:prstGeom>
+          <a:noFill/>
+          <a:effectLst/>
+        </p:spPr>
+        <p:txBody>
+          <a:bodyPr wrap="none" lIns="18288" rIns="18288" tIns="18288" bIns="18288" anchor="t">
+            <a:spAutoFit/>
+          </a:bodyPr>
+          <a:lstStyle/>
+          <a:p>
+            <a:pPr algn="r">
+              <a:spcAft>
+                <a:spcPts val="0"/>
+              </a:spcAft>
+            </a:pPr>
+            <a:r>
+              <a:rPr sz="1050" b="0" i="0">
+                <a:solidFill>
+                  <a:srgbClr val="B4C7D2"/>
+                </a:solidFill>
+                <a:latin typeface="Arial"/>
+              </a:rPr>
+              <a:t>1.00</a:t>
+            </a:r>
+          </a:p>
+        </p:txBody>
+      </p:sp>
+      <p:sp>
+        <p:nvSpPr>
+          <p:cNvPr id="36" name="C1-E09 text 34" descr="sci-ppt:o034"/>
+          <p:cNvSpPr txBox="1"/>
+          <p:nvPr/>
+        </p:nvSpPr>
+        <p:spPr>
+          <a:xfrm>
+            <a:off x="868680" y="5312664"/>
+            <a:ext cx="5486400" cy="231648"/>
+          </a:xfrm>
+          <a:prstGeom prst="rect">
+            <a:avLst/>
+          </a:prstGeom>
+          <a:noFill/>
+          <a:effectLst/>
+        </p:spPr>
+        <p:txBody>
+          <a:bodyPr wrap="none" lIns="18288" rIns="18288" tIns="18288" bIns="18288" anchor="t">
+            <a:spAutoFit/>
+          </a:bodyPr>
+          <a:lstStyle/>
+          <a:p>
+            <a:pPr algn="ctr">
+              <a:spcAft>
+                <a:spcPts val="0"/>
+              </a:spcAft>
+            </a:pPr>
+            <a:r>
+              <a:rPr sz="1200" b="0" i="0">
+                <a:solidFill>
+                  <a:srgbClr val="E7F0F3"/>
+                </a:solidFill>
+                <a:latin typeface="Arial"/>
+              </a:rPr>
+              <a:t>r / R</a:t>
+            </a:r>
+          </a:p>
+        </p:txBody>
+      </p:sp>
+      <p:sp>
+        <p:nvSpPr>
+          <p:cNvPr id="37" name="C1-E09 text 35" descr="sci-ppt:o035"/>
+          <p:cNvSpPr txBox="1"/>
+          <p:nvPr/>
+        </p:nvSpPr>
+        <p:spPr>
+          <a:xfrm>
+            <a:off x="320040" y="1024128"/>
+            <a:ext cx="5486400" cy="231648"/>
+          </a:xfrm>
+          <a:prstGeom prst="rect">
+            <a:avLst/>
+          </a:prstGeom>
+          <a:noFill/>
+          <a:effectLst/>
+        </p:spPr>
+        <p:txBody>
+          <a:bodyPr wrap="none" lIns="18288" rIns="18288" tIns="18288" bIns="18288" anchor="t">
             <a:spAutoFit/>
           </a:bodyPr>
           <a:lstStyle/>
@@ -3257,51 +4111,720 @@
               </a:spcAft>
             </a:pPr>
             <a:r>
-              <a:rPr sz="2111" b="0" i="0">
+              <a:rPr sz="1200" b="0" i="0">
                 <a:solidFill>
                   <a:srgbClr val="E7F0F3"/>
                 </a:solidFill>
                 <a:latin typeface="Arial"/>
               </a:rPr>
-              <a:t>Cavity</a:t>
-            </a:r>
+              <a:t>K(&lt;r) / K(∞)</a:t>
+            </a:r>
+          </a:p>
+        </p:txBody>
+      </p:sp>
+      <p:sp>
+        <p:nvSpPr>
+          <p:cNvPr id="38" name="C1-E09 polygon 36" descr="sci-ppt:o036"/>
+          <p:cNvSpPr/>
+          <p:nvPr/>
+        </p:nvSpPr>
+        <p:spPr>
+          <a:xfrm>
+            <a:off x="868680" y="2126342"/>
+            <a:ext cx="5486400" cy="2902858"/>
+          </a:xfrm>
+          <a:custGeom>
+            <a:avLst/>
+            <a:gdLst/>
+            <a:ahLst/>
+            <a:cxnLst/>
+            <a:rect l="l" t="t" r="r" b="b"/>
+            <a:pathLst>
+              <a:path w="5486400" h="2902858">
+                <a:moveTo>
+                  <a:pt x="0" y="2902858"/>
+                </a:moveTo>
+                <a:lnTo>
+                  <a:pt x="27569" y="2817479"/>
+                </a:lnTo>
+                <a:lnTo>
+                  <a:pt x="55139" y="2736186"/>
+                </a:lnTo>
+                <a:lnTo>
+                  <a:pt x="82709" y="2658692"/>
+                </a:lnTo>
+                <a:lnTo>
+                  <a:pt x="110279" y="2584736"/>
+                </a:lnTo>
+                <a:lnTo>
+                  <a:pt x="137849" y="2514082"/>
+                </a:lnTo>
+                <a:lnTo>
+                  <a:pt x="165419" y="2446513"/>
+                </a:lnTo>
+                <a:lnTo>
+                  <a:pt x="192988" y="2381832"/>
+                </a:lnTo>
+                <a:lnTo>
+                  <a:pt x="220558" y="2319857"/>
+                </a:lnTo>
+                <a:lnTo>
+                  <a:pt x="248128" y="2260422"/>
+                </a:lnTo>
+                <a:lnTo>
+                  <a:pt x="275698" y="2203374"/>
+                </a:lnTo>
+                <a:lnTo>
+                  <a:pt x="303268" y="2148572"/>
+                </a:lnTo>
+                <a:lnTo>
+                  <a:pt x="330838" y="2095886"/>
+                </a:lnTo>
+                <a:lnTo>
+                  <a:pt x="358408" y="2045195"/>
+                </a:lnTo>
+                <a:lnTo>
+                  <a:pt x="385977" y="1996389"/>
+                </a:lnTo>
+                <a:lnTo>
+                  <a:pt x="413547" y="1949364"/>
+                </a:lnTo>
+                <a:lnTo>
+                  <a:pt x="441117" y="1904025"/>
+                </a:lnTo>
+                <a:lnTo>
+                  <a:pt x="468687" y="1860282"/>
+                </a:lnTo>
+                <a:lnTo>
+                  <a:pt x="496257" y="1818053"/>
+                </a:lnTo>
+                <a:lnTo>
+                  <a:pt x="523827" y="1777260"/>
+                </a:lnTo>
+                <a:lnTo>
+                  <a:pt x="551396" y="1737831"/>
+                </a:lnTo>
+                <a:lnTo>
+                  <a:pt x="578966" y="1699700"/>
+                </a:lnTo>
+                <a:lnTo>
+                  <a:pt x="606536" y="1662802"/>
+                </a:lnTo>
+                <a:lnTo>
+                  <a:pt x="634106" y="1627080"/>
+                </a:lnTo>
+                <a:lnTo>
+                  <a:pt x="661676" y="1592477"/>
+                </a:lnTo>
+                <a:lnTo>
+                  <a:pt x="689246" y="1558942"/>
+                </a:lnTo>
+                <a:lnTo>
+                  <a:pt x="716816" y="1526427"/>
+                </a:lnTo>
+                <a:lnTo>
+                  <a:pt x="744385" y="1494885"/>
+                </a:lnTo>
+                <a:lnTo>
+                  <a:pt x="771955" y="1464273"/>
+                </a:lnTo>
+                <a:lnTo>
+                  <a:pt x="799525" y="1434552"/>
+                </a:lnTo>
+                <a:lnTo>
+                  <a:pt x="827095" y="1405682"/>
+                </a:lnTo>
+                <a:lnTo>
+                  <a:pt x="854665" y="1377627"/>
+                </a:lnTo>
+                <a:lnTo>
+                  <a:pt x="882235" y="1350355"/>
+                </a:lnTo>
+                <a:lnTo>
+                  <a:pt x="909805" y="1323831"/>
+                </a:lnTo>
+                <a:lnTo>
+                  <a:pt x="937374" y="1298026"/>
+                </a:lnTo>
+                <a:lnTo>
+                  <a:pt x="964944" y="1272911"/>
+                </a:lnTo>
+                <a:lnTo>
+                  <a:pt x="992514" y="1248459"/>
+                </a:lnTo>
+                <a:lnTo>
+                  <a:pt x="1020084" y="1224643"/>
+                </a:lnTo>
+                <a:lnTo>
+                  <a:pt x="1047654" y="1201440"/>
+                </a:lnTo>
+                <a:lnTo>
+                  <a:pt x="1075224" y="1178826"/>
+                </a:lnTo>
+                <a:lnTo>
+                  <a:pt x="1102793" y="1156778"/>
+                </a:lnTo>
+                <a:lnTo>
+                  <a:pt x="1130363" y="1135276"/>
+                </a:lnTo>
+                <a:lnTo>
+                  <a:pt x="1157933" y="1114300"/>
+                </a:lnTo>
+                <a:lnTo>
+                  <a:pt x="1185503" y="1093831"/>
+                </a:lnTo>
+                <a:lnTo>
+                  <a:pt x="1213073" y="1073850"/>
+                </a:lnTo>
+                <a:lnTo>
+                  <a:pt x="1240643" y="1054340"/>
+                </a:lnTo>
+                <a:lnTo>
+                  <a:pt x="1268213" y="1035285"/>
+                </a:lnTo>
+                <a:lnTo>
+                  <a:pt x="1295782" y="1016669"/>
+                </a:lnTo>
+                <a:lnTo>
+                  <a:pt x="1323352" y="998477"/>
+                </a:lnTo>
+                <a:lnTo>
+                  <a:pt x="1350922" y="980695"/>
+                </a:lnTo>
+                <a:lnTo>
+                  <a:pt x="1378492" y="963309"/>
+                </a:lnTo>
+                <a:lnTo>
+                  <a:pt x="1406062" y="946306"/>
+                </a:lnTo>
+                <a:lnTo>
+                  <a:pt x="1433632" y="929674"/>
+                </a:lnTo>
+                <a:lnTo>
+                  <a:pt x="1461202" y="913399"/>
+                </a:lnTo>
+                <a:lnTo>
+                  <a:pt x="1488771" y="897472"/>
+                </a:lnTo>
+                <a:lnTo>
+                  <a:pt x="1516341" y="881881"/>
+                </a:lnTo>
+                <a:lnTo>
+                  <a:pt x="1543911" y="866615"/>
+                </a:lnTo>
+                <a:lnTo>
+                  <a:pt x="1571481" y="851665"/>
+                </a:lnTo>
+                <a:lnTo>
+                  <a:pt x="1599051" y="837021"/>
+                </a:lnTo>
+                <a:lnTo>
+                  <a:pt x="1626621" y="822672"/>
+                </a:lnTo>
+                <a:lnTo>
+                  <a:pt x="1654190" y="808612"/>
+                </a:lnTo>
+                <a:lnTo>
+                  <a:pt x="1681760" y="794830"/>
+                </a:lnTo>
+                <a:lnTo>
+                  <a:pt x="1709330" y="781319"/>
+                </a:lnTo>
+                <a:lnTo>
+                  <a:pt x="1736900" y="768072"/>
+                </a:lnTo>
+                <a:lnTo>
+                  <a:pt x="1764470" y="755079"/>
+                </a:lnTo>
+                <a:lnTo>
+                  <a:pt x="1792040" y="742334"/>
+                </a:lnTo>
+                <a:lnTo>
+                  <a:pt x="1819610" y="729830"/>
+                </a:lnTo>
+                <a:lnTo>
+                  <a:pt x="1847179" y="717561"/>
+                </a:lnTo>
+                <a:lnTo>
+                  <a:pt x="1874749" y="705519"/>
+                </a:lnTo>
+                <a:lnTo>
+                  <a:pt x="1902319" y="693698"/>
+                </a:lnTo>
+                <a:lnTo>
+                  <a:pt x="1929889" y="682092"/>
+                </a:lnTo>
+                <a:lnTo>
+                  <a:pt x="1957459" y="670697"/>
+                </a:lnTo>
+                <a:lnTo>
+                  <a:pt x="1985029" y="659505"/>
+                </a:lnTo>
+                <a:lnTo>
+                  <a:pt x="2012598" y="648511"/>
+                </a:lnTo>
+                <a:lnTo>
+                  <a:pt x="2040168" y="637711"/>
+                </a:lnTo>
+                <a:lnTo>
+                  <a:pt x="2067738" y="627098"/>
+                </a:lnTo>
+                <a:lnTo>
+                  <a:pt x="2095308" y="616669"/>
+                </a:lnTo>
+                <a:lnTo>
+                  <a:pt x="2122878" y="606419"/>
+                </a:lnTo>
+                <a:lnTo>
+                  <a:pt x="2150448" y="596343"/>
+                </a:lnTo>
+                <a:lnTo>
+                  <a:pt x="2178018" y="586436"/>
+                </a:lnTo>
+                <a:lnTo>
+                  <a:pt x="2205587" y="576695"/>
+                </a:lnTo>
+                <a:lnTo>
+                  <a:pt x="2233157" y="567115"/>
+                </a:lnTo>
+                <a:lnTo>
+                  <a:pt x="2260727" y="557692"/>
+                </a:lnTo>
+                <a:lnTo>
+                  <a:pt x="2288297" y="548423"/>
+                </a:lnTo>
+                <a:lnTo>
+                  <a:pt x="2315867" y="539303"/>
+                </a:lnTo>
+                <a:lnTo>
+                  <a:pt x="2343437" y="530330"/>
+                </a:lnTo>
+                <a:lnTo>
+                  <a:pt x="2371007" y="521499"/>
+                </a:lnTo>
+                <a:lnTo>
+                  <a:pt x="2398576" y="512808"/>
+                </a:lnTo>
+                <a:lnTo>
+                  <a:pt x="2426146" y="504253"/>
+                </a:lnTo>
+                <a:lnTo>
+                  <a:pt x="2453716" y="495830"/>
+                </a:lnTo>
+                <a:lnTo>
+                  <a:pt x="2481286" y="487537"/>
+                </a:lnTo>
+                <a:lnTo>
+                  <a:pt x="2508856" y="479371"/>
+                </a:lnTo>
+                <a:lnTo>
+                  <a:pt x="2536426" y="471329"/>
+                </a:lnTo>
+                <a:lnTo>
+                  <a:pt x="2563995" y="463408"/>
+                </a:lnTo>
+                <a:lnTo>
+                  <a:pt x="2591565" y="455606"/>
+                </a:lnTo>
+                <a:lnTo>
+                  <a:pt x="2619135" y="447919"/>
+                </a:lnTo>
+                <a:lnTo>
+                  <a:pt x="2646705" y="440345"/>
+                </a:lnTo>
+                <a:lnTo>
+                  <a:pt x="2674275" y="432883"/>
+                </a:lnTo>
+                <a:lnTo>
+                  <a:pt x="2701845" y="425528"/>
+                </a:lnTo>
+                <a:lnTo>
+                  <a:pt x="2729415" y="418279"/>
+                </a:lnTo>
+                <a:lnTo>
+                  <a:pt x="2756984" y="411135"/>
+                </a:lnTo>
+                <a:lnTo>
+                  <a:pt x="2784554" y="404091"/>
+                </a:lnTo>
+                <a:lnTo>
+                  <a:pt x="2812124" y="397147"/>
+                </a:lnTo>
+                <a:lnTo>
+                  <a:pt x="2839694" y="390300"/>
+                </a:lnTo>
+                <a:lnTo>
+                  <a:pt x="2867264" y="383549"/>
+                </a:lnTo>
+                <a:lnTo>
+                  <a:pt x="2894834" y="376891"/>
+                </a:lnTo>
+                <a:lnTo>
+                  <a:pt x="2922404" y="370324"/>
+                </a:lnTo>
+                <a:lnTo>
+                  <a:pt x="2949973" y="363846"/>
+                </a:lnTo>
+                <a:lnTo>
+                  <a:pt x="2977543" y="357456"/>
+                </a:lnTo>
+                <a:lnTo>
+                  <a:pt x="3005113" y="351152"/>
+                </a:lnTo>
+                <a:lnTo>
+                  <a:pt x="3032683" y="344933"/>
+                </a:lnTo>
+                <a:lnTo>
+                  <a:pt x="3060253" y="338795"/>
+                </a:lnTo>
+                <a:lnTo>
+                  <a:pt x="3087823" y="332739"/>
+                </a:lnTo>
+                <a:lnTo>
+                  <a:pt x="3115392" y="326762"/>
+                </a:lnTo>
+                <a:lnTo>
+                  <a:pt x="3142962" y="320862"/>
+                </a:lnTo>
+                <a:lnTo>
+                  <a:pt x="3170532" y="315039"/>
+                </a:lnTo>
+                <a:lnTo>
+                  <a:pt x="3198102" y="309291"/>
+                </a:lnTo>
+                <a:lnTo>
+                  <a:pt x="3225672" y="303616"/>
+                </a:lnTo>
+                <a:lnTo>
+                  <a:pt x="3253242" y="298012"/>
+                </a:lnTo>
+                <a:lnTo>
+                  <a:pt x="3280812" y="292480"/>
+                </a:lnTo>
+                <a:lnTo>
+                  <a:pt x="3308381" y="287016"/>
+                </a:lnTo>
+                <a:lnTo>
+                  <a:pt x="3335951" y="281621"/>
+                </a:lnTo>
+                <a:lnTo>
+                  <a:pt x="3363521" y="276292"/>
+                </a:lnTo>
+                <a:lnTo>
+                  <a:pt x="3391091" y="271029"/>
+                </a:lnTo>
+                <a:lnTo>
+                  <a:pt x="3418661" y="265830"/>
+                </a:lnTo>
+                <a:lnTo>
+                  <a:pt x="3446231" y="260694"/>
+                </a:lnTo>
+                <a:lnTo>
+                  <a:pt x="3473801" y="255620"/>
+                </a:lnTo>
+                <a:lnTo>
+                  <a:pt x="3501370" y="250607"/>
+                </a:lnTo>
+                <a:lnTo>
+                  <a:pt x="3528940" y="245653"/>
+                </a:lnTo>
+                <a:lnTo>
+                  <a:pt x="3556510" y="240759"/>
+                </a:lnTo>
+                <a:lnTo>
+                  <a:pt x="3584080" y="235922"/>
+                </a:lnTo>
+                <a:lnTo>
+                  <a:pt x="3611650" y="231141"/>
+                </a:lnTo>
+                <a:lnTo>
+                  <a:pt x="3639220" y="226416"/>
+                </a:lnTo>
+                <a:lnTo>
+                  <a:pt x="3666789" y="221746"/>
+                </a:lnTo>
+                <a:lnTo>
+                  <a:pt x="3694359" y="217130"/>
+                </a:lnTo>
+                <a:lnTo>
+                  <a:pt x="3721929" y="212567"/>
+                </a:lnTo>
+                <a:lnTo>
+                  <a:pt x="3749499" y="208055"/>
+                </a:lnTo>
+                <a:lnTo>
+                  <a:pt x="3777069" y="203594"/>
+                </a:lnTo>
+                <a:lnTo>
+                  <a:pt x="3804639" y="199184"/>
+                </a:lnTo>
+                <a:lnTo>
+                  <a:pt x="3832209" y="194823"/>
+                </a:lnTo>
+                <a:lnTo>
+                  <a:pt x="3859778" y="190510"/>
+                </a:lnTo>
+                <a:lnTo>
+                  <a:pt x="3887348" y="186246"/>
+                </a:lnTo>
+                <a:lnTo>
+                  <a:pt x="3914918" y="182028"/>
+                </a:lnTo>
+                <a:lnTo>
+                  <a:pt x="3942488" y="177856"/>
+                </a:lnTo>
+                <a:lnTo>
+                  <a:pt x="3970058" y="173730"/>
+                </a:lnTo>
+                <a:lnTo>
+                  <a:pt x="3997628" y="169648"/>
+                </a:lnTo>
+                <a:lnTo>
+                  <a:pt x="4025197" y="165610"/>
+                </a:lnTo>
+                <a:lnTo>
+                  <a:pt x="4052767" y="161616"/>
+                </a:lnTo>
+                <a:lnTo>
+                  <a:pt x="4080337" y="157664"/>
+                </a:lnTo>
+                <a:lnTo>
+                  <a:pt x="4107907" y="153753"/>
+                </a:lnTo>
+                <a:lnTo>
+                  <a:pt x="4135477" y="149884"/>
+                </a:lnTo>
+                <a:lnTo>
+                  <a:pt x="4163047" y="146056"/>
+                </a:lnTo>
+                <a:lnTo>
+                  <a:pt x="4190617" y="142268"/>
+                </a:lnTo>
+                <a:lnTo>
+                  <a:pt x="4218186" y="138518"/>
+                </a:lnTo>
+                <a:lnTo>
+                  <a:pt x="4245756" y="134808"/>
+                </a:lnTo>
+                <a:lnTo>
+                  <a:pt x="4273326" y="131136"/>
+                </a:lnTo>
+                <a:lnTo>
+                  <a:pt x="4300896" y="127501"/>
+                </a:lnTo>
+                <a:lnTo>
+                  <a:pt x="4328466" y="123903"/>
+                </a:lnTo>
+                <a:lnTo>
+                  <a:pt x="4356036" y="120341"/>
+                </a:lnTo>
+                <a:lnTo>
+                  <a:pt x="4383606" y="116816"/>
+                </a:lnTo>
+                <a:lnTo>
+                  <a:pt x="4411175" y="113325"/>
+                </a:lnTo>
+                <a:lnTo>
+                  <a:pt x="4438745" y="109869"/>
+                </a:lnTo>
+                <a:lnTo>
+                  <a:pt x="4466315" y="106448"/>
+                </a:lnTo>
+                <a:lnTo>
+                  <a:pt x="4493885" y="103060"/>
+                </a:lnTo>
+                <a:lnTo>
+                  <a:pt x="4521455" y="99706"/>
+                </a:lnTo>
+                <a:lnTo>
+                  <a:pt x="4549025" y="96384"/>
+                </a:lnTo>
+                <a:lnTo>
+                  <a:pt x="4576594" y="93095"/>
+                </a:lnTo>
+                <a:lnTo>
+                  <a:pt x="4604164" y="89837"/>
+                </a:lnTo>
+                <a:lnTo>
+                  <a:pt x="4631734" y="86611"/>
+                </a:lnTo>
+                <a:lnTo>
+                  <a:pt x="4659304" y="83416"/>
+                </a:lnTo>
+                <a:lnTo>
+                  <a:pt x="4686874" y="80251"/>
+                </a:lnTo>
+                <a:lnTo>
+                  <a:pt x="4714444" y="77116"/>
+                </a:lnTo>
+                <a:lnTo>
+                  <a:pt x="4742014" y="74011"/>
+                </a:lnTo>
+                <a:lnTo>
+                  <a:pt x="4769583" y="70935"/>
+                </a:lnTo>
+                <a:lnTo>
+                  <a:pt x="4797153" y="67888"/>
+                </a:lnTo>
+                <a:lnTo>
+                  <a:pt x="4824723" y="64869"/>
+                </a:lnTo>
+                <a:lnTo>
+                  <a:pt x="4852293" y="61878"/>
+                </a:lnTo>
+                <a:lnTo>
+                  <a:pt x="4879863" y="58914"/>
+                </a:lnTo>
+                <a:lnTo>
+                  <a:pt x="4907433" y="55978"/>
+                </a:lnTo>
+                <a:lnTo>
+                  <a:pt x="4935003" y="53069"/>
+                </a:lnTo>
+                <a:lnTo>
+                  <a:pt x="4962572" y="50186"/>
+                </a:lnTo>
+                <a:lnTo>
+                  <a:pt x="4990142" y="47330"/>
+                </a:lnTo>
+                <a:lnTo>
+                  <a:pt x="5017712" y="44499"/>
+                </a:lnTo>
+                <a:lnTo>
+                  <a:pt x="5045282" y="41693"/>
+                </a:lnTo>
+                <a:lnTo>
+                  <a:pt x="5072852" y="38913"/>
+                </a:lnTo>
+                <a:lnTo>
+                  <a:pt x="5100422" y="36157"/>
+                </a:lnTo>
+                <a:lnTo>
+                  <a:pt x="5127991" y="33426"/>
+                </a:lnTo>
+                <a:lnTo>
+                  <a:pt x="5155561" y="30718"/>
+                </a:lnTo>
+                <a:lnTo>
+                  <a:pt x="5183131" y="28035"/>
+                </a:lnTo>
+                <a:lnTo>
+                  <a:pt x="5210701" y="25375"/>
+                </a:lnTo>
+                <a:lnTo>
+                  <a:pt x="5238271" y="22738"/>
+                </a:lnTo>
+                <a:lnTo>
+                  <a:pt x="5265841" y="20124"/>
+                </a:lnTo>
+                <a:lnTo>
+                  <a:pt x="5293411" y="17533"/>
+                </a:lnTo>
+                <a:lnTo>
+                  <a:pt x="5320980" y="14964"/>
+                </a:lnTo>
+                <a:lnTo>
+                  <a:pt x="5348550" y="12416"/>
+                </a:lnTo>
+                <a:lnTo>
+                  <a:pt x="5376120" y="9891"/>
+                </a:lnTo>
+                <a:lnTo>
+                  <a:pt x="5403690" y="7387"/>
+                </a:lnTo>
+                <a:lnTo>
+                  <a:pt x="5431260" y="4904"/>
+                </a:lnTo>
+                <a:lnTo>
+                  <a:pt x="5458830" y="2442"/>
+                </a:lnTo>
+                <a:lnTo>
+                  <a:pt x="5486400" y="0"/>
+                </a:lnTo>
+              </a:path>
+            </a:pathLst>
+          </a:custGeom>
+          <a:noFill/>
+          <a:ln w="38100">
+            <a:solidFill>
+              <a:srgbClr val="8EDBD4"/>
+            </a:solidFill>
+          </a:ln>
+          <a:effectLst/>
+        </p:spPr>
+        <p:txBody>
+          <a:bodyPr rtlCol="0" anchor="ctr"/>
+          <a:lstStyle/>
+          <a:p>
+            <a:pPr algn="ctr"/>
           </a:p>
         </p:txBody>
       </p:sp>
       <p:cxnSp>
         <p:nvCxnSpPr>
-          <p:cNvPr id="7" name="arrow6" descr="sci-ppt:C1-E09-006"/>
+          <p:cNvPr id="39" name="C1-E09 line 37" descr="sci-ppt:o037"/>
           <p:cNvCxnSpPr/>
           <p:nvPr/>
         </p:nvCxnSpPr>
         <p:spPr>
           <a:xfrm>
-            <a:off x="3413760" y="2621280"/>
-            <a:ext cx="1767840" cy="0"/>
+            <a:off x="868680" y="1545771"/>
+            <a:ext cx="5486400" cy="0"/>
           </a:xfrm>
           <a:prstGeom prst="line">
             <a:avLst/>
           </a:prstGeom>
-          <a:ln w="25400">
+          <a:ln w="16510">
             <a:solidFill>
-              <a:srgbClr val="8EDBD4"/>
+              <a:srgbClr val="F2B880"/>
             </a:solidFill>
-            <a:headEnd type="none" w="med" len="med"/>
-            <a:tailEnd type="triangle" w="med" len="med"/>
+            <a:prstDash val="dash"/>
           </a:ln>
           <a:effectLst/>
         </p:spPr>
       </p:cxnSp>
       <p:sp>
         <p:nvSpPr>
-          <p:cNvPr id="8" name="text7" descr="sci-ppt:C1-E09-007"/>
+          <p:cNvPr id="40" name="C1-E09 ellipse 38" descr="sci-ppt:o038"/>
+          <p:cNvSpPr/>
+          <p:nvPr/>
+        </p:nvSpPr>
+        <p:spPr>
+          <a:xfrm>
+            <a:off x="1892808" y="3214333"/>
+            <a:ext cx="146304" cy="146304"/>
+          </a:xfrm>
+          <a:prstGeom prst="ellipse">
+            <a:avLst/>
+          </a:prstGeom>
+          <a:solidFill>
+            <a:srgbClr val="F2B880"/>
+          </a:solidFill>
+          <a:ln w="12700">
+            <a:solidFill>
+              <a:srgbClr val="F2B880"/>
+            </a:solidFill>
+          </a:ln>
+          <a:effectLst/>
+        </p:spPr>
+        <p:txBody>
+          <a:bodyPr rtlCol="0" anchor="ctr"/>
+          <a:lstStyle/>
+          <a:p>
+            <a:pPr algn="ctr"/>
+          </a:p>
+        </p:txBody>
+      </p:sp>
+      <p:sp>
+        <p:nvSpPr>
+          <p:cNvPr id="41" name="C1-E09 text 39" descr="sci-ppt:o039"/>
           <p:cNvSpPr txBox="1"/>
           <p:nvPr/>
         </p:nvSpPr>
         <p:spPr>
           <a:xfrm>
-            <a:off x="5486400" y="1950720"/>
-            <a:ext cx="6096000" cy="377952"/>
+            <a:off x="2093976" y="3324061"/>
+            <a:ext cx="2194560" cy="239395"/>
           </a:xfrm>
           <a:prstGeom prst="rect">
             <a:avLst/>
@@ -3310,7 +4833,7 @@
           <a:effectLst/>
         </p:spPr>
         <p:txBody>
-          <a:bodyPr wrap="none" lIns="27432" rIns="27432" tIns="18288" bIns="18288" anchor="ctr">
+          <a:bodyPr wrap="none" lIns="18288" rIns="18288" tIns="18288" bIns="18288" anchor="t">
             <a:spAutoFit/>
           </a:bodyPr>
           <a:lstStyle/>
@@ -3321,27 +4844,463 @@
               </a:spcAft>
             </a:pPr>
             <a:r>
-              <a:rPr sz="1920" b="0" i="0">
+              <a:rPr sz="1250" b="0" i="0">
+                <a:solidFill>
+                  <a:srgbClr val="F2B880"/>
+                </a:solidFill>
+                <a:latin typeface="Arial"/>
+              </a:rPr>
+              <a:t>50 % inside r = 2R</a:t>
+            </a:r>
+          </a:p>
+        </p:txBody>
+      </p:sp>
+      <p:sp>
+        <p:nvSpPr>
+          <p:cNvPr id="42" name="C1-E09 ellipse 40" descr="sci-ppt:o040"/>
+          <p:cNvSpPr/>
+          <p:nvPr/>
+        </p:nvSpPr>
+        <p:spPr>
+          <a:xfrm>
+            <a:off x="4087368" y="2343476"/>
+            <a:ext cx="146304" cy="146304"/>
+          </a:xfrm>
+          <a:prstGeom prst="ellipse">
+            <a:avLst/>
+          </a:prstGeom>
+          <a:solidFill>
+            <a:srgbClr val="F2B880"/>
+          </a:solidFill>
+          <a:ln w="12700">
+            <a:solidFill>
+              <a:srgbClr val="F2B880"/>
+            </a:solidFill>
+          </a:ln>
+          <a:effectLst/>
+        </p:spPr>
+        <p:txBody>
+          <a:bodyPr rtlCol="0" anchor="ctr"/>
+          <a:lstStyle/>
+          <a:p>
+            <a:pPr algn="ctr"/>
+          </a:p>
+        </p:txBody>
+      </p:sp>
+      <p:sp>
+        <p:nvSpPr>
+          <p:cNvPr id="43" name="C1-E09 text 41" descr="sci-ppt:o041"/>
+          <p:cNvSpPr txBox="1"/>
+          <p:nvPr/>
+        </p:nvSpPr>
+        <p:spPr>
+          <a:xfrm>
+            <a:off x="4288536" y="2453204"/>
+            <a:ext cx="2194560" cy="239395"/>
+          </a:xfrm>
+          <a:prstGeom prst="rect">
+            <a:avLst/>
+          </a:prstGeom>
+          <a:noFill/>
+          <a:effectLst/>
+        </p:spPr>
+        <p:txBody>
+          <a:bodyPr wrap="none" lIns="18288" rIns="18288" tIns="18288" bIns="18288" anchor="t">
+            <a:spAutoFit/>
+          </a:bodyPr>
+          <a:lstStyle/>
+          <a:p>
+            <a:pPr algn="l">
+              <a:spcAft>
+                <a:spcPts val="0"/>
+              </a:spcAft>
+            </a:pPr>
+            <a:r>
+              <a:rPr sz="1250" b="0" i="0">
+                <a:solidFill>
+                  <a:srgbClr val="F2B880"/>
+                </a:solidFill>
+                <a:latin typeface="Arial"/>
+              </a:rPr>
+              <a:t>75 % inside r = 4R</a:t>
+            </a:r>
+          </a:p>
+        </p:txBody>
+      </p:sp>
+      <p:sp>
+        <p:nvSpPr>
+          <p:cNvPr id="44" name="C1-E09 text 42" descr="sci-ppt:o042"/>
+          <p:cNvSpPr txBox="1"/>
+          <p:nvPr/>
+        </p:nvSpPr>
+        <p:spPr>
+          <a:xfrm>
+            <a:off x="2697480" y="1582347"/>
+            <a:ext cx="2926080" cy="231648"/>
+          </a:xfrm>
+          <a:prstGeom prst="rect">
+            <a:avLst/>
+          </a:prstGeom>
+          <a:noFill/>
+          <a:effectLst/>
+        </p:spPr>
+        <p:txBody>
+          <a:bodyPr wrap="none" lIns="18288" rIns="18288" tIns="18288" bIns="18288" anchor="t">
+            <a:spAutoFit/>
+          </a:bodyPr>
+          <a:lstStyle/>
+          <a:p>
+            <a:pPr algn="l">
+              <a:spcAft>
+                <a:spcPts val="0"/>
+              </a:spcAft>
+            </a:pPr>
+            <a:r>
+              <a:rPr sz="1200" b="0" i="0">
+                <a:solidFill>
+                  <a:srgbClr val="F2B880"/>
+                </a:solidFill>
+                <a:latin typeface="Arial"/>
+              </a:rPr>
+              <a:t>K(∞) = 2πρR³Ṙ² is finite</a:t>
+            </a:r>
+          </a:p>
+        </p:txBody>
+      </p:sp>
+      <p:sp>
+        <p:nvSpPr>
+          <p:cNvPr id="45" name="C1-E09 round_rect 43" descr="sci-ppt:o043"/>
+          <p:cNvSpPr/>
+          <p:nvPr/>
+        </p:nvSpPr>
+        <p:spPr>
+          <a:xfrm>
+            <a:off x="6675120" y="1325880"/>
+            <a:ext cx="5166360" cy="4297680"/>
+          </a:xfrm>
+          <a:prstGeom prst="roundRect">
+            <a:avLst/>
+          </a:prstGeom>
+          <a:solidFill>
+            <a:srgbClr val="213E4B"/>
+          </a:solidFill>
+          <a:ln w="20320">
+            <a:solidFill>
+              <a:srgbClr val="8EDBD4"/>
+            </a:solidFill>
+          </a:ln>
+          <a:effectLst/>
+        </p:spPr>
+        <p:txBody>
+          <a:bodyPr rtlCol="0" anchor="ctr"/>
+          <a:lstStyle/>
+          <a:p>
+            <a:pPr algn="ctr"/>
+          </a:p>
+        </p:txBody>
+      </p:sp>
+      <p:sp>
+        <p:nvSpPr>
+          <p:cNvPr id="46" name="C1-E09 text 44" descr="sci-ppt:o044"/>
+          <p:cNvSpPr txBox="1"/>
+          <p:nvPr/>
+        </p:nvSpPr>
+        <p:spPr>
+          <a:xfrm>
+            <a:off x="6784848" y="1380744"/>
+            <a:ext cx="4946904" cy="254889"/>
+          </a:xfrm>
+          <a:prstGeom prst="rect">
+            <a:avLst/>
+          </a:prstGeom>
+          <a:noFill/>
+          <a:effectLst/>
+        </p:spPr>
+        <p:txBody>
+          <a:bodyPr wrap="none" lIns="18288" rIns="18288" tIns="18288" bIns="18288" anchor="t">
+            <a:spAutoFit/>
+          </a:bodyPr>
+          <a:lstStyle/>
+          <a:p>
+            <a:pPr algn="l">
+              <a:spcAft>
+                <a:spcPts val="0"/>
+              </a:spcAft>
+            </a:pPr>
+            <a:r>
+              <a:rPr sz="1350" b="1" i="0">
+                <a:solidFill>
+                  <a:srgbClr val="8EDBD4"/>
+                </a:solidFill>
+                <a:latin typeface="Arial"/>
+              </a:rPr>
+              <a:t>Energy lives in thin shells</a:t>
+            </a:r>
+          </a:p>
+        </p:txBody>
+      </p:sp>
+      <p:sp>
+        <p:nvSpPr>
+          <p:cNvPr id="47" name="C1-E09 text 45" descr="sci-ppt:o045"/>
+          <p:cNvSpPr txBox="1"/>
+          <p:nvPr/>
+        </p:nvSpPr>
+        <p:spPr>
+          <a:xfrm>
+            <a:off x="6812280" y="1783080"/>
+            <a:ext cx="4937760" cy="254889"/>
+          </a:xfrm>
+          <a:prstGeom prst="rect">
+            <a:avLst/>
+          </a:prstGeom>
+          <a:noFill/>
+          <a:effectLst/>
+        </p:spPr>
+        <p:txBody>
+          <a:bodyPr wrap="none" lIns="18288" rIns="18288" tIns="18288" bIns="18288" anchor="t">
+            <a:spAutoFit/>
+          </a:bodyPr>
+          <a:lstStyle/>
+          <a:p>
+            <a:pPr algn="l">
+              <a:spcAft>
+                <a:spcPts val="0"/>
+              </a:spcAft>
+            </a:pPr>
+            <a:r>
+              <a:rPr sz="1350" b="1" i="0">
                 <a:solidFill>
                   <a:srgbClr val="E7F0F3"/>
                 </a:solidFill>
                 <a:latin typeface="Arial"/>
               </a:rPr>
-              <a:t>Exterior liquid shells: 4π r² dr</a:t>
-            </a:r>
-          </a:p>
-        </p:txBody>
-      </p:sp>
-      <p:sp>
-        <p:nvSpPr>
-          <p:cNvPr id="9" name="text8" descr="sci-ppt:C1-E09-008"/>
+              <a:t>dK = ½ρu² · 4πr² dr  ∝  r⁻² dr</a:t>
+            </a:r>
+          </a:p>
+        </p:txBody>
+      </p:sp>
+      <p:sp>
+        <p:nvSpPr>
+          <p:cNvPr id="48" name="C1-E09 ellipse 46" descr="sci-ppt:o046"/>
+          <p:cNvSpPr/>
+          <p:nvPr/>
+        </p:nvSpPr>
+        <p:spPr>
+          <a:xfrm>
+            <a:off x="7918704" y="2112263"/>
+            <a:ext cx="2633472" cy="2633472"/>
+          </a:xfrm>
+          <a:prstGeom prst="ellipse">
+            <a:avLst/>
+          </a:prstGeom>
+          <a:solidFill>
+            <a:srgbClr val="1E4A5A">
+              <a:alpha val="85000"/>
+            </a:srgbClr>
+          </a:solidFill>
+          <a:ln w="10160">
+            <a:solidFill>
+              <a:srgbClr val="B4C7D2">
+                <a:alpha val="85000"/>
+              </a:srgbClr>
+            </a:solidFill>
+          </a:ln>
+          <a:effectLst/>
+        </p:spPr>
+        <p:txBody>
+          <a:bodyPr rtlCol="0" anchor="ctr"/>
+          <a:lstStyle/>
+          <a:p>
+            <a:pPr algn="ctr"/>
+          </a:p>
+        </p:txBody>
+      </p:sp>
+      <p:sp>
+        <p:nvSpPr>
+          <p:cNvPr id="49" name="C1-E09 ellipse 47" descr="sci-ppt:o047"/>
+          <p:cNvSpPr/>
+          <p:nvPr/>
+        </p:nvSpPr>
+        <p:spPr>
+          <a:xfrm>
+            <a:off x="8206740" y="2400300"/>
+            <a:ext cx="2057400" cy="2057400"/>
+          </a:xfrm>
+          <a:prstGeom prst="ellipse">
+            <a:avLst/>
+          </a:prstGeom>
+          <a:solidFill>
+            <a:srgbClr val="2B6678">
+              <a:alpha val="85000"/>
+            </a:srgbClr>
+          </a:solidFill>
+          <a:ln w="10160">
+            <a:solidFill>
+              <a:srgbClr val="B4C7D2">
+                <a:alpha val="85000"/>
+              </a:srgbClr>
+            </a:solidFill>
+          </a:ln>
+          <a:effectLst/>
+        </p:spPr>
+        <p:txBody>
+          <a:bodyPr rtlCol="0" anchor="ctr"/>
+          <a:lstStyle/>
+          <a:p>
+            <a:pPr algn="ctr"/>
+          </a:p>
+        </p:txBody>
+      </p:sp>
+      <p:sp>
+        <p:nvSpPr>
+          <p:cNvPr id="50" name="C1-E09 ellipse 48" descr="sci-ppt:o048"/>
+          <p:cNvSpPr/>
+          <p:nvPr/>
+        </p:nvSpPr>
+        <p:spPr>
+          <a:xfrm>
+            <a:off x="8453628" y="2647188"/>
+            <a:ext cx="1563624" cy="1563624"/>
+          </a:xfrm>
+          <a:prstGeom prst="ellipse">
+            <a:avLst/>
+          </a:prstGeom>
+          <a:solidFill>
+            <a:srgbClr val="1E4A5A">
+              <a:alpha val="85000"/>
+            </a:srgbClr>
+          </a:solidFill>
+          <a:ln w="10160">
+            <a:solidFill>
+              <a:srgbClr val="B4C7D2">
+                <a:alpha val="85000"/>
+              </a:srgbClr>
+            </a:solidFill>
+          </a:ln>
+          <a:effectLst/>
+        </p:spPr>
+        <p:txBody>
+          <a:bodyPr rtlCol="0" anchor="ctr"/>
+          <a:lstStyle/>
+          <a:p>
+            <a:pPr algn="ctr"/>
+          </a:p>
+        </p:txBody>
+      </p:sp>
+      <p:sp>
+        <p:nvSpPr>
+          <p:cNvPr id="51" name="C1-E09 ellipse 49" descr="sci-ppt:o049"/>
+          <p:cNvSpPr/>
+          <p:nvPr/>
+        </p:nvSpPr>
+        <p:spPr>
+          <a:xfrm>
+            <a:off x="8638794" y="2832354"/>
+            <a:ext cx="1193292" cy="1193292"/>
+          </a:xfrm>
+          <a:prstGeom prst="ellipse">
+            <a:avLst/>
+          </a:prstGeom>
+          <a:solidFill>
+            <a:srgbClr val="2B6678">
+              <a:alpha val="85000"/>
+            </a:srgbClr>
+          </a:solidFill>
+          <a:ln w="10160">
+            <a:solidFill>
+              <a:srgbClr val="B4C7D2">
+                <a:alpha val="85000"/>
+              </a:srgbClr>
+            </a:solidFill>
+          </a:ln>
+          <a:effectLst/>
+        </p:spPr>
+        <p:txBody>
+          <a:bodyPr rtlCol="0" anchor="ctr"/>
+          <a:lstStyle/>
+          <a:p>
+            <a:pPr algn="ctr"/>
+          </a:p>
+        </p:txBody>
+      </p:sp>
+      <p:sp>
+        <p:nvSpPr>
+          <p:cNvPr id="52" name="C1-E09 ellipse 50" descr="sci-ppt:o050"/>
+          <p:cNvSpPr/>
+          <p:nvPr/>
+        </p:nvSpPr>
+        <p:spPr>
+          <a:xfrm>
+            <a:off x="8762238" y="2955798"/>
+            <a:ext cx="946403" cy="946403"/>
+          </a:xfrm>
+          <a:prstGeom prst="ellipse">
+            <a:avLst/>
+          </a:prstGeom>
+          <a:solidFill>
+            <a:srgbClr val="1E4A5A">
+              <a:alpha val="85000"/>
+            </a:srgbClr>
+          </a:solidFill>
+          <a:ln w="10160">
+            <a:solidFill>
+              <a:srgbClr val="B4C7D2">
+                <a:alpha val="85000"/>
+              </a:srgbClr>
+            </a:solidFill>
+          </a:ln>
+          <a:effectLst/>
+        </p:spPr>
+        <p:txBody>
+          <a:bodyPr rtlCol="0" anchor="ctr"/>
+          <a:lstStyle/>
+          <a:p>
+            <a:pPr algn="ctr"/>
+          </a:p>
+        </p:txBody>
+      </p:sp>
+      <p:sp>
+        <p:nvSpPr>
+          <p:cNvPr id="53" name="C1-E09 ellipse 51" descr="sci-ppt:o051"/>
+          <p:cNvSpPr/>
+          <p:nvPr/>
+        </p:nvSpPr>
+        <p:spPr>
+          <a:xfrm>
+            <a:off x="8823960" y="3017520"/>
+            <a:ext cx="822960" cy="822960"/>
+          </a:xfrm>
+          <a:prstGeom prst="ellipse">
+            <a:avLst/>
+          </a:prstGeom>
+          <a:solidFill>
+            <a:srgbClr val="0C1820"/>
+          </a:solidFill>
+          <a:ln w="27940">
+            <a:solidFill>
+              <a:srgbClr val="F2B880"/>
+            </a:solidFill>
+          </a:ln>
+          <a:effectLst/>
+        </p:spPr>
+        <p:txBody>
+          <a:bodyPr rtlCol="0" anchor="ctr"/>
+          <a:lstStyle/>
+          <a:p>
+            <a:pPr algn="ctr"/>
+          </a:p>
+        </p:txBody>
+      </p:sp>
+      <p:sp>
+        <p:nvSpPr>
+          <p:cNvPr id="54" name="C1-E09 text 52" descr="sci-ppt:o052"/>
           <p:cNvSpPr txBox="1"/>
           <p:nvPr/>
         </p:nvSpPr>
         <p:spPr>
           <a:xfrm>
-            <a:off x="5486400" y="2621280"/>
-            <a:ext cx="5852160" cy="359054"/>
+            <a:off x="6812280" y="4846320"/>
+            <a:ext cx="4937760" cy="433070"/>
           </a:xfrm>
           <a:prstGeom prst="rect">
             <a:avLst/>
@@ -3350,7 +5309,7 @@
           <a:effectLst/>
         </p:spPr>
         <p:txBody>
-          <a:bodyPr wrap="none" lIns="27432" rIns="27432" tIns="18288" bIns="18288" anchor="ctr">
+          <a:bodyPr wrap="none" lIns="18288" rIns="18288" tIns="18288" bIns="18288" anchor="t">
             <a:spAutoFit/>
           </a:bodyPr>
           <a:lstStyle/>
@@ -3361,39 +5320,15 @@
               </a:spcAft>
             </a:pPr>
             <a:r>
-              <a:rPr sz="1823" b="0" i="0">
+              <a:rPr sz="1250" b="0" i="0">
                 <a:solidFill>
                   <a:srgbClr val="E7F0F3"/>
                 </a:solidFill>
                 <a:latin typeface="Arial"/>
               </a:rPr>
-              <a:t>Integrate r from R to infinity</a:t>
-            </a:r>
-          </a:p>
-        </p:txBody>
-      </p:sp>
-      <p:sp>
-        <p:nvSpPr>
-          <p:cNvPr id="10" name="text9" descr="sci-ppt:C1-E09-009"/>
-          <p:cNvSpPr txBox="1"/>
-          <p:nvPr/>
-        </p:nvSpPr>
-        <p:spPr>
-          <a:xfrm>
-            <a:off x="5486400" y="3352800"/>
-            <a:ext cx="5608320" cy="377952"/>
-          </a:xfrm>
-          <a:prstGeom prst="rect">
-            <a:avLst/>
-          </a:prstGeom>
-          <a:noFill/>
-          <a:effectLst/>
-        </p:spPr>
-        <p:txBody>
-          <a:bodyPr wrap="none" lIns="27432" rIns="27432" tIns="18288" bIns="18288" anchor="ctr">
-            <a:spAutoFit/>
-          </a:bodyPr>
-          <a:lstStyle/>
+              <a:t>u² ∝ r⁻⁴ but shell volume ∝ r²: the integrand falls as</a:t>
+            </a:r>
+          </a:p>
           <a:p>
             <a:pPr algn="l">
               <a:spcAft>
@@ -3401,27 +5336,27 @@
               </a:spcAft>
             </a:pPr>
             <a:r>
-              <a:rPr sz="1920" b="0" i="0">
+              <a:rPr sz="1250" b="0" i="0">
                 <a:solidFill>
                   <a:srgbClr val="E7F0F3"/>
                 </a:solidFill>
                 <a:latin typeface="Arial"/>
               </a:rPr>
-              <a:t>Storage K_l</a:t>
-            </a:r>
-          </a:p>
-        </p:txBody>
-      </p:sp>
-      <p:sp>
-        <p:nvSpPr>
-          <p:cNvPr id="11" name="text10" descr="sci-ppt:C1-E09-010"/>
+              <a:t>r⁻², so even an infinite liquid holds finite energy.</a:t>
+            </a:r>
+          </a:p>
+        </p:txBody>
+      </p:sp>
+      <p:sp>
+        <p:nvSpPr>
+          <p:cNvPr id="55" name="C1-E09 text 53" descr="sci-ppt:o053"/>
           <p:cNvSpPr txBox="1"/>
           <p:nvPr/>
         </p:nvSpPr>
         <p:spPr>
           <a:xfrm>
-            <a:off x="365760" y="4974336"/>
-            <a:ext cx="5547360" cy="321259"/>
+            <a:off x="868680" y="5733288"/>
+            <a:ext cx="10972800" cy="254889"/>
           </a:xfrm>
           <a:prstGeom prst="rect">
             <a:avLst/>
@@ -3430,7 +5365,7 @@
           <a:effectLst/>
         </p:spPr>
         <p:txBody>
-          <a:bodyPr wrap="none" lIns="27432" rIns="27432" tIns="18288" bIns="18288" anchor="ctr">
+          <a:bodyPr wrap="none" lIns="18288" rIns="18288" tIns="18288" bIns="18288" anchor="t">
             <a:spAutoFit/>
           </a:bodyPr>
           <a:lstStyle/>
@@ -3441,27 +5376,27 @@
               </a:spcAft>
             </a:pPr>
             <a:r>
-              <a:rPr sz="1632" b="0" i="0">
+              <a:rPr sz="1350" b="1" i="0">
                 <a:solidFill>
                   <a:srgbClr val="E7F0F3"/>
                 </a:solidFill>
                 <a:latin typeface="Arial"/>
               </a:rPr>
-              <a:t>Kl</a:t>
-            </a:r>
-          </a:p>
-        </p:txBody>
-      </p:sp>
-      <p:sp>
-        <p:nvSpPr>
-          <p:cNvPr id="12" name="text11" descr="sci-ppt:C1-E09-011"/>
+              <a:t>Kₗ = ∫ ½ρu² 4πr² dr = 2πρR⁴Ṙ² ∫ r⁻² dr = 2πρR³Ṙ²</a:t>
+            </a:r>
+          </a:p>
+        </p:txBody>
+      </p:sp>
+      <p:sp>
+        <p:nvSpPr>
+          <p:cNvPr id="56" name="C1-E09 text 54" descr="sci-ppt:o054"/>
           <p:cNvSpPr txBox="1"/>
           <p:nvPr/>
         </p:nvSpPr>
         <p:spPr>
           <a:xfrm>
-            <a:off x="365760" y="5266944"/>
-            <a:ext cx="5547360" cy="321259"/>
+            <a:off x="868680" y="6126480"/>
+            <a:ext cx="10972800" cy="247142"/>
           </a:xfrm>
           <a:prstGeom prst="rect">
             <a:avLst/>
@@ -3470,7 +5405,7 @@
           <a:effectLst/>
         </p:spPr>
         <p:txBody>
-          <a:bodyPr wrap="none" lIns="27432" rIns="27432" tIns="18288" bIns="18288" anchor="ctr">
+          <a:bodyPr wrap="none" lIns="18288" rIns="18288" tIns="18288" bIns="18288" anchor="t">
             <a:spAutoFit/>
           </a:bodyPr>
           <a:lstStyle/>
@@ -3481,27 +5416,27 @@
               </a:spcAft>
             </a:pPr>
             <a:r>
-              <a:rPr sz="1632" b="0" i="0">
+              <a:rPr sz="1300" b="0" i="0">
                 <a:solidFill>
-                  <a:srgbClr val="E7F0F3"/>
+                  <a:srgbClr val="F2B880"/>
                 </a:solidFill>
                 <a:latin typeface="Arial"/>
               </a:rPr>
-              <a:t>u(r,t)</a:t>
-            </a:r>
-          </a:p>
-        </p:txBody>
-      </p:sp>
-      <p:sp>
-        <p:nvSpPr>
-          <p:cNvPr id="13" name="text12" descr="sci-ppt:C1-E09-012"/>
+              <a:t>Half of it is within one extra bubble radius of the wall.</a:t>
+            </a:r>
+          </a:p>
+        </p:txBody>
+      </p:sp>
+      <p:sp>
+        <p:nvSpPr>
+          <p:cNvPr id="57" name="C1-E09 text 55" descr="sci-ppt:o055"/>
           <p:cNvSpPr txBox="1"/>
           <p:nvPr/>
         </p:nvSpPr>
         <p:spPr>
           <a:xfrm>
-            <a:off x="365760" y="5559552"/>
-            <a:ext cx="5547360" cy="321259"/>
+            <a:off x="320040" y="6510528"/>
+            <a:ext cx="11521440" cy="200660"/>
           </a:xfrm>
           <a:prstGeom prst="rect">
             <a:avLst/>
@@ -3510,7 +5445,7 @@
           <a:effectLst/>
         </p:spPr>
         <p:txBody>
-          <a:bodyPr wrap="none" lIns="27432" rIns="27432" tIns="18288" bIns="18288" anchor="ctr">
+          <a:bodyPr wrap="none" lIns="18288" rIns="18288" tIns="18288" bIns="18288" anchor="t">
             <a:spAutoFit/>
           </a:bodyPr>
           <a:lstStyle/>
@@ -3521,293 +5456,13 @@
               </a:spcAft>
             </a:pPr>
             <a:r>
-              <a:rPr sz="1632" b="0" i="0">
-                <a:solidFill>
-                  <a:srgbClr val="E7F0F3"/>
-                </a:solidFill>
-                <a:latin typeface="Arial"/>
-              </a:rPr>
-              <a:t>Ṙ</a:t>
-            </a:r>
-          </a:p>
-        </p:txBody>
-      </p:sp>
-      <p:sp>
-        <p:nvSpPr>
-          <p:cNvPr id="14" name="text13" descr="sci-ppt:C1-E09-013"/>
-          <p:cNvSpPr txBox="1"/>
-          <p:nvPr/>
-        </p:nvSpPr>
-        <p:spPr>
-          <a:xfrm>
-            <a:off x="365760" y="5852160"/>
-            <a:ext cx="5547360" cy="321259"/>
-          </a:xfrm>
-          <a:prstGeom prst="rect">
-            <a:avLst/>
-          </a:prstGeom>
-          <a:noFill/>
-          <a:effectLst/>
-        </p:spPr>
-        <p:txBody>
-          <a:bodyPr wrap="none" lIns="27432" rIns="27432" tIns="18288" bIns="18288" anchor="ctr">
-            <a:spAutoFit/>
-          </a:bodyPr>
-          <a:lstStyle/>
-          <a:p>
-            <a:pPr algn="l">
-              <a:spcAft>
-                <a:spcPts val="0"/>
-              </a:spcAft>
-            </a:pPr>
-            <a:r>
-              <a:rPr sz="1632" b="0" i="0">
-                <a:solidFill>
-                  <a:srgbClr val="E7F0F3"/>
-                </a:solidFill>
-                <a:latin typeface="Arial"/>
-              </a:rPr>
-              <a:t>4πr²dr</a:t>
-            </a:r>
-          </a:p>
-        </p:txBody>
-      </p:sp>
-      <p:sp>
-        <p:nvSpPr>
-          <p:cNvPr id="15" name="text14" descr="sci-ppt:C1-E09-014"/>
-          <p:cNvSpPr txBox="1"/>
-          <p:nvPr/>
-        </p:nvSpPr>
-        <p:spPr>
-          <a:xfrm>
-            <a:off x="6156960" y="4974336"/>
-            <a:ext cx="5547360" cy="321259"/>
-          </a:xfrm>
-          <a:prstGeom prst="rect">
-            <a:avLst/>
-          </a:prstGeom>
-          <a:noFill/>
-          <a:effectLst/>
-        </p:spPr>
-        <p:txBody>
-          <a:bodyPr wrap="none" lIns="27432" rIns="27432" tIns="18288" bIns="18288" anchor="ctr">
-            <a:spAutoFit/>
-          </a:bodyPr>
-          <a:lstStyle/>
-          <a:p>
-            <a:pPr algn="l">
-              <a:spcAft>
-                <a:spcPts val="0"/>
-              </a:spcAft>
-            </a:pPr>
-            <a:r>
-              <a:rPr sz="1632" b="0" i="0">
-                <a:solidFill>
-                  <a:srgbClr val="E7F0F3"/>
-                </a:solidFill>
-                <a:latin typeface="Arial"/>
-              </a:rPr>
-              <a:t>ρ</a:t>
-            </a:r>
-          </a:p>
-        </p:txBody>
-      </p:sp>
-      <p:sp>
-        <p:nvSpPr>
-          <p:cNvPr id="16" name="text15" descr="sci-ppt:C1-E09-015"/>
-          <p:cNvSpPr txBox="1"/>
-          <p:nvPr/>
-        </p:nvSpPr>
-        <p:spPr>
-          <a:xfrm>
-            <a:off x="6156960" y="5266944"/>
-            <a:ext cx="5547360" cy="321259"/>
-          </a:xfrm>
-          <a:prstGeom prst="rect">
-            <a:avLst/>
-          </a:prstGeom>
-          <a:noFill/>
-          <a:effectLst/>
-        </p:spPr>
-        <p:txBody>
-          <a:bodyPr wrap="none" lIns="27432" rIns="27432" tIns="18288" bIns="18288" anchor="ctr">
-            <a:spAutoFit/>
-          </a:bodyPr>
-          <a:lstStyle/>
-          <a:p>
-            <a:pPr algn="l">
-              <a:spcAft>
-                <a:spcPts val="0"/>
-              </a:spcAft>
-            </a:pPr>
-            <a:r>
-              <a:rPr sz="1632" b="0" i="0">
-                <a:solidFill>
-                  <a:srgbClr val="E7F0F3"/>
-                </a:solidFill>
-                <a:latin typeface="Arial"/>
-              </a:rPr>
-              <a:t>R</a:t>
-            </a:r>
-          </a:p>
-        </p:txBody>
-      </p:sp>
-      <p:sp>
-        <p:nvSpPr>
-          <p:cNvPr id="17" name="text16" descr="sci-ppt:C1-E09-016"/>
-          <p:cNvSpPr txBox="1"/>
-          <p:nvPr/>
-        </p:nvSpPr>
-        <p:spPr>
-          <a:xfrm>
-            <a:off x="6156960" y="5559552"/>
-            <a:ext cx="5547360" cy="321259"/>
-          </a:xfrm>
-          <a:prstGeom prst="rect">
-            <a:avLst/>
-          </a:prstGeom>
-          <a:noFill/>
-          <a:effectLst/>
-        </p:spPr>
-        <p:txBody>
-          <a:bodyPr wrap="none" lIns="27432" rIns="27432" tIns="18288" bIns="18288" anchor="ctr">
-            <a:spAutoFit/>
-          </a:bodyPr>
-          <a:lstStyle/>
-          <a:p>
-            <a:pPr algn="l">
-              <a:spcAft>
-                <a:spcPts val="0"/>
-              </a:spcAft>
-            </a:pPr>
-            <a:r>
-              <a:rPr sz="1632" b="0" i="0">
-                <a:solidFill>
-                  <a:srgbClr val="E7F0F3"/>
-                </a:solidFill>
-                <a:latin typeface="Arial"/>
-              </a:rPr>
-              <a:t>r: exterior shells</a:t>
-            </a:r>
-          </a:p>
-        </p:txBody>
-      </p:sp>
-      <p:sp>
-        <p:nvSpPr>
-          <p:cNvPr id="18" name="text17" descr="sci-ppt:C1-E09-017"/>
-          <p:cNvSpPr txBox="1"/>
-          <p:nvPr/>
-        </p:nvSpPr>
-        <p:spPr>
-          <a:xfrm>
-            <a:off x="6156960" y="5852160"/>
-            <a:ext cx="5547360" cy="321259"/>
-          </a:xfrm>
-          <a:prstGeom prst="rect">
-            <a:avLst/>
-          </a:prstGeom>
-          <a:noFill/>
-          <a:effectLst/>
-        </p:spPr>
-        <p:txBody>
-          <a:bodyPr wrap="none" lIns="27432" rIns="27432" tIns="18288" bIns="18288" anchor="ctr">
-            <a:spAutoFit/>
-          </a:bodyPr>
-          <a:lstStyle/>
-          <a:p>
-            <a:pPr algn="l">
-              <a:spcAft>
-                <a:spcPts val="0"/>
-              </a:spcAft>
-            </a:pPr>
-            <a:r>
-              <a:rPr sz="1632" b="0" i="0">
-                <a:solidFill>
-                  <a:srgbClr val="E7F0F3"/>
-                </a:solidFill>
-                <a:latin typeface="Arial"/>
-              </a:rPr>
-              <a:t>t</a:t>
-            </a:r>
-          </a:p>
-        </p:txBody>
-      </p:sp>
-      <p:sp>
-        <p:nvSpPr>
-          <p:cNvPr id="19" name="text18" descr="sci-ppt:C1-E09-018"/>
-          <p:cNvSpPr txBox="1"/>
-          <p:nvPr/>
-        </p:nvSpPr>
-        <p:spPr>
-          <a:xfrm>
-            <a:off x="365760" y="6339840"/>
-            <a:ext cx="11277600" cy="302361"/>
-          </a:xfrm>
-          <a:prstGeom prst="rect">
-            <a:avLst/>
-          </a:prstGeom>
-          <a:noFill/>
-          <a:effectLst/>
-        </p:spPr>
-        <p:txBody>
-          <a:bodyPr wrap="none" lIns="27432" rIns="27432" tIns="18288" bIns="18288" anchor="ctr">
-            <a:spAutoFit/>
-          </a:bodyPr>
-          <a:lstStyle/>
-          <a:p>
-            <a:pPr algn="l">
-              <a:spcAft>
-                <a:spcPts val="0"/>
-              </a:spcAft>
-            </a:pPr>
-            <a:r>
-              <a:rPr sz="1536" b="0" i="0">
+              <a:rPr sz="1000" b="0" i="0">
                 <a:solidFill>
                   <a:srgbClr val="B4C7D2"/>
                 </a:solidFill>
                 <a:latin typeface="Arial"/>
               </a:rPr>
-              <a:t>Integrate liquid shells outside the cavity</a:t>
-            </a:r>
-          </a:p>
-        </p:txBody>
-      </p:sp>
-      <p:sp>
-        <p:nvSpPr>
-          <p:cNvPr id="20" name="text19" descr="sci-ppt:C1-E09-019"/>
-          <p:cNvSpPr txBox="1"/>
-          <p:nvPr/>
-        </p:nvSpPr>
-        <p:spPr>
-          <a:xfrm>
-            <a:off x="365760" y="6632448"/>
-            <a:ext cx="11277600" cy="302361"/>
-          </a:xfrm>
-          <a:prstGeom prst="rect">
-            <a:avLst/>
-          </a:prstGeom>
-          <a:noFill/>
-          <a:effectLst/>
-        </p:spPr>
-        <p:txBody>
-          <a:bodyPr wrap="none" lIns="27432" rIns="27432" tIns="18288" bIns="18288" anchor="ctr">
-            <a:spAutoFit/>
-          </a:bodyPr>
-          <a:lstStyle/>
-          <a:p>
-            <a:pPr algn="l">
-              <a:spcAft>
-                <a:spcPts val="0"/>
-              </a:spcAft>
-            </a:pPr>
-            <a:r>
-              <a:rPr sz="1536" b="0" i="0">
-                <a:solidFill>
-                  <a:srgbClr val="B4C7D2"/>
-                </a:solidFill>
-                <a:latin typeface="Arial"/>
-              </a:rPr>
-              <a:t>The radial field decays enough for finite kinetic energy</a:t>
+              <a:t>Cumulative fraction K(&lt;r)/K = 1 − R/r from Eq. C1-E09.</a:t>
             </a:r>
           </a:p>
         </p:txBody>
